--- a/data-eng/decks/w3d4s1.pptx
+++ b/data-eng/decks/w3d4s1.pptx
@@ -3100,7 +3100,7 @@
       <p:grpSpPr/>
       <p:sp>
         <p:nvSpPr>
-          <p:cNvPr id="2" name="Oval 1"/>
+          <p:cNvPr id="2" name="deckgen:decor"/>
           <p:cNvSpPr/>
           <p:nvPr/>
         </p:nvSpPr>
@@ -3130,7 +3130,7 @@
       </p:sp>
       <p:sp>
         <p:nvSpPr>
-          <p:cNvPr id="3" name="Oval 2"/>
+          <p:cNvPr id="3" name="deckgen:decor"/>
           <p:cNvSpPr/>
           <p:nvPr/>
         </p:nvSpPr>
@@ -3160,7 +3160,7 @@
       </p:sp>
       <p:sp>
         <p:nvSpPr>
-          <p:cNvPr id="4" name="Oval 3"/>
+          <p:cNvPr id="4" name="deckgen:decor"/>
           <p:cNvSpPr/>
           <p:nvPr/>
         </p:nvSpPr>
@@ -3190,7 +3190,7 @@
       </p:sp>
       <p:sp>
         <p:nvSpPr>
-          <p:cNvPr id="5" name="Rectangle 4"/>
+          <p:cNvPr id="5" name="deckgen:decor"/>
           <p:cNvSpPr/>
           <p:nvPr/>
         </p:nvSpPr>
@@ -3220,7 +3220,7 @@
       </p:sp>
       <p:sp>
         <p:nvSpPr>
-          <p:cNvPr id="6" name="Oval 5"/>
+          <p:cNvPr id="6" name="deckgen:decor"/>
           <p:cNvSpPr/>
           <p:nvPr/>
         </p:nvSpPr>
@@ -3250,7 +3250,7 @@
       </p:sp>
       <p:sp>
         <p:nvSpPr>
-          <p:cNvPr id="7" name="Oval 6"/>
+          <p:cNvPr id="7" name="deckgen:decor"/>
           <p:cNvSpPr/>
           <p:nvPr/>
         </p:nvSpPr>
@@ -3280,7 +3280,7 @@
       </p:sp>
       <p:sp>
         <p:nvSpPr>
-          <p:cNvPr id="8" name="Oval 7"/>
+          <p:cNvPr id="8" name="deckgen:decor"/>
           <p:cNvSpPr/>
           <p:nvPr/>
         </p:nvSpPr>
@@ -3310,7 +3310,7 @@
       </p:sp>
       <p:sp>
         <p:nvSpPr>
-          <p:cNvPr id="9" name="Oval 8"/>
+          <p:cNvPr id="9" name="deckgen:decor"/>
           <p:cNvSpPr/>
           <p:nvPr/>
         </p:nvSpPr>
@@ -3340,7 +3340,7 @@
       </p:sp>
       <p:sp>
         <p:nvSpPr>
-          <p:cNvPr id="10" name="Rectangle 9"/>
+          <p:cNvPr id="10" name="deckgen:decor"/>
           <p:cNvSpPr/>
           <p:nvPr/>
         </p:nvSpPr>
@@ -3600,7 +3600,7 @@
       <p:grpSpPr/>
       <p:sp>
         <p:nvSpPr>
-          <p:cNvPr id="2" name="Oval 1"/>
+          <p:cNvPr id="2" name="deckgen:decor"/>
           <p:cNvSpPr/>
           <p:nvPr/>
         </p:nvSpPr>
@@ -3630,7 +3630,7 @@
       </p:sp>
       <p:sp>
         <p:nvSpPr>
-          <p:cNvPr id="3" name="Oval 2"/>
+          <p:cNvPr id="3" name="deckgen:decor"/>
           <p:cNvSpPr/>
           <p:nvPr/>
         </p:nvSpPr>
@@ -3660,7 +3660,7 @@
       </p:sp>
       <p:sp>
         <p:nvSpPr>
-          <p:cNvPr id="4" name="Oval 3"/>
+          <p:cNvPr id="4" name="deckgen:decor"/>
           <p:cNvSpPr/>
           <p:nvPr/>
         </p:nvSpPr>
@@ -4662,7 +4662,7 @@
       <p:grpSpPr/>
       <p:sp>
         <p:nvSpPr>
-          <p:cNvPr id="2" name="Oval 1"/>
+          <p:cNvPr id="2" name="deckgen:decor"/>
           <p:cNvSpPr/>
           <p:nvPr/>
         </p:nvSpPr>
@@ -4692,7 +4692,7 @@
       </p:sp>
       <p:sp>
         <p:nvSpPr>
-          <p:cNvPr id="3" name="Oval 2"/>
+          <p:cNvPr id="3" name="deckgen:decor"/>
           <p:cNvSpPr/>
           <p:nvPr/>
         </p:nvSpPr>
@@ -4868,7 +4868,7 @@
                 <a:ea typeface="Pretendard"/>
                 <a:cs typeface="Pretendard"/>
               </a:rPr>
-              <a:t>Parquet 와 CSV 를 적재 없이 곧바로 JOIN 하고, 3-2 의 Pandas 결과와 답이 같은지 교차 검증합니다</a:t>
+              <a:t>Parquet 와 CSV 를 적재 없이 곧바로 JOIN 하고, 3-2 의 Pandas 결과와 교차 검증합니다</a:t>
             </a:r>
           </a:p>
         </p:txBody>
@@ -5444,7 +5444,7 @@
                 <a:ea typeface="Pretendard"/>
                 <a:cs typeface="Pretendard"/>
               </a:rPr>
-              <a:t>3-1·3-2·3-3 의 데이터 파일 세 개</a:t>
+              <a:t>3-1·3-2·3-3 의 파일 넷</a:t>
             </a:r>
           </a:p>
         </p:txBody>
@@ -5469,7 +5469,7 @@
       <p:grpSpPr/>
       <p:sp>
         <p:nvSpPr>
-          <p:cNvPr id="2" name="Oval 1"/>
+          <p:cNvPr id="2" name="deckgen:decor"/>
           <p:cNvSpPr/>
           <p:nvPr/>
         </p:nvSpPr>
@@ -5499,7 +5499,7 @@
       </p:sp>
       <p:sp>
         <p:nvSpPr>
-          <p:cNvPr id="3" name="Oval 2"/>
+          <p:cNvPr id="3" name="deckgen:decor"/>
           <p:cNvSpPr/>
           <p:nvPr/>
         </p:nvSpPr>
@@ -5529,7 +5529,7 @@
       </p:sp>
       <p:sp>
         <p:nvSpPr>
-          <p:cNvPr id="4" name="Oval 3"/>
+          <p:cNvPr id="4" name="deckgen:decor"/>
           <p:cNvSpPr/>
           <p:nvPr/>
         </p:nvSpPr>
@@ -6460,7 +6460,7 @@
       <p:grpSpPr/>
       <p:sp>
         <p:nvSpPr>
-          <p:cNvPr id="2" name="Oval 1"/>
+          <p:cNvPr id="2" name="deckgen:decor"/>
           <p:cNvSpPr/>
           <p:nvPr/>
         </p:nvSpPr>
@@ -6490,7 +6490,7 @@
       </p:sp>
       <p:sp>
         <p:nvSpPr>
-          <p:cNvPr id="3" name="Oval 2"/>
+          <p:cNvPr id="3" name="deckgen:decor"/>
           <p:cNvSpPr/>
           <p:nvPr/>
         </p:nvSpPr>
@@ -6520,7 +6520,7 @@
       </p:sp>
       <p:sp>
         <p:nvSpPr>
-          <p:cNvPr id="4" name="Oval 3"/>
+          <p:cNvPr id="4" name="deckgen:decor"/>
           <p:cNvSpPr/>
           <p:nvPr/>
         </p:nvSpPr>
@@ -8396,7 +8396,7 @@
       <p:grpSpPr/>
       <p:sp>
         <p:nvSpPr>
-          <p:cNvPr id="2" name="Oval 1"/>
+          <p:cNvPr id="2" name="deckgen:decor"/>
           <p:cNvSpPr/>
           <p:nvPr/>
         </p:nvSpPr>
@@ -8426,7 +8426,7 @@
       </p:sp>
       <p:sp>
         <p:nvSpPr>
-          <p:cNvPr id="3" name="Oval 2"/>
+          <p:cNvPr id="3" name="deckgen:decor"/>
           <p:cNvSpPr/>
           <p:nvPr/>
         </p:nvSpPr>
@@ -8456,7 +8456,7 @@
       </p:sp>
       <p:sp>
         <p:nvSpPr>
-          <p:cNvPr id="4" name="Oval 3"/>
+          <p:cNvPr id="4" name="deckgen:decor"/>
           <p:cNvSpPr/>
           <p:nvPr/>
         </p:nvSpPr>
@@ -9516,7 +9516,7 @@
       <p:grpSpPr/>
       <p:sp>
         <p:nvSpPr>
-          <p:cNvPr id="2" name="Oval 1"/>
+          <p:cNvPr id="2" name="deckgen:decor"/>
           <p:cNvSpPr/>
           <p:nvPr/>
         </p:nvSpPr>
@@ -9546,7 +9546,7 @@
       </p:sp>
       <p:sp>
         <p:nvSpPr>
-          <p:cNvPr id="3" name="Oval 2"/>
+          <p:cNvPr id="3" name="deckgen:decor"/>
           <p:cNvSpPr/>
           <p:nvPr/>
         </p:nvSpPr>
@@ -9576,7 +9576,7 @@
       </p:sp>
       <p:sp>
         <p:nvSpPr>
-          <p:cNvPr id="4" name="Oval 3"/>
+          <p:cNvPr id="4" name="deckgen:decor"/>
           <p:cNvSpPr/>
           <p:nvPr/>
         </p:nvSpPr>
@@ -10614,7 +10614,7 @@
       <p:grpSpPr/>
       <p:sp>
         <p:nvSpPr>
-          <p:cNvPr id="2" name="Oval 1"/>
+          <p:cNvPr id="2" name="deckgen:decor"/>
           <p:cNvSpPr/>
           <p:nvPr/>
         </p:nvSpPr>
@@ -10644,7 +10644,7 @@
       </p:sp>
       <p:sp>
         <p:nvSpPr>
-          <p:cNvPr id="3" name="Oval 2"/>
+          <p:cNvPr id="3" name="deckgen:decor"/>
           <p:cNvSpPr/>
           <p:nvPr/>
         </p:nvSpPr>
@@ -10674,7 +10674,7 @@
       </p:sp>
       <p:sp>
         <p:nvSpPr>
-          <p:cNvPr id="4" name="Oval 3"/>
+          <p:cNvPr id="4" name="deckgen:decor"/>
           <p:cNvSpPr/>
           <p:nvPr/>
         </p:nvSpPr>
@@ -10891,7 +10891,7 @@
                 <a:ea typeface="Pretendard"/>
                 <a:cs typeface="Pretendard"/>
               </a:rPr>
-              <a:t>WHERE 에 윈도 별칭을 못 쓰니 한 겹 감싼다</a:t>
+              <a:t>WHERE 에 윈도 함수를 못 쓰니 한 겹 감싼다</a:t>
             </a:r>
           </a:p>
         </p:txBody>
@@ -11893,7 +11893,7 @@
       <p:grpSpPr/>
       <p:sp>
         <p:nvSpPr>
-          <p:cNvPr id="2" name="Oval 1"/>
+          <p:cNvPr id="2" name="deckgen:decor"/>
           <p:cNvSpPr/>
           <p:nvPr/>
         </p:nvSpPr>
@@ -11923,7 +11923,7 @@
       </p:sp>
       <p:sp>
         <p:nvSpPr>
-          <p:cNvPr id="3" name="Oval 2"/>
+          <p:cNvPr id="3" name="deckgen:decor"/>
           <p:cNvSpPr/>
           <p:nvPr/>
         </p:nvSpPr>
@@ -11953,7 +11953,7 @@
       </p:sp>
       <p:sp>
         <p:nvSpPr>
-          <p:cNvPr id="4" name="Oval 3"/>
+          <p:cNvPr id="4" name="deckgen:decor"/>
           <p:cNvSpPr/>
           <p:nvPr/>
         </p:nvSpPr>
@@ -12159,7 +12159,7 @@
       </p:sp>
       <p:sp>
         <p:nvSpPr>
-          <p:cNvPr id="10" name="TextBox 9"/>
+          <p:cNvPr id="10" name="deckgen:ornament"/>
           <p:cNvSpPr txBox="1"/>
           <p:nvPr/>
         </p:nvSpPr>
@@ -12344,7 +12344,7 @@
       </p:sp>
       <p:sp>
         <p:nvSpPr>
-          <p:cNvPr id="14" name="TextBox 13"/>
+          <p:cNvPr id="14" name="deckgen:ornament"/>
           <p:cNvSpPr txBox="1"/>
           <p:nvPr/>
         </p:nvSpPr>
@@ -12666,7 +12666,7 @@
       <p:grpSpPr/>
       <p:sp>
         <p:nvSpPr>
-          <p:cNvPr id="2" name="Oval 1"/>
+          <p:cNvPr id="2" name="deckgen:decor"/>
           <p:cNvSpPr/>
           <p:nvPr/>
         </p:nvSpPr>
@@ -12696,7 +12696,7 @@
       </p:sp>
       <p:sp>
         <p:nvSpPr>
-          <p:cNvPr id="3" name="Oval 2"/>
+          <p:cNvPr id="3" name="deckgen:decor"/>
           <p:cNvSpPr/>
           <p:nvPr/>
         </p:nvSpPr>
@@ -12726,7 +12726,7 @@
       </p:sp>
       <p:sp>
         <p:nvSpPr>
-          <p:cNvPr id="4" name="Oval 3"/>
+          <p:cNvPr id="4" name="deckgen:decor"/>
           <p:cNvSpPr/>
           <p:nvPr/>
         </p:nvSpPr>
@@ -13422,7 +13422,7 @@
                 <a:ea typeface="Pretendard"/>
                 <a:cs typeface="Pretendard"/>
               </a:rPr>
-              <a:t>.fetchall() 파이썬 리스트 · .arrow() PyArrow 테이블(4주차)</a:t>
+              <a:t>.fetchall() 파이썬 리스트 · .to_arrow_table() PyArrow 테이블</a:t>
             </a:r>
           </a:p>
         </p:txBody>
@@ -13764,7 +13764,7 @@
       <p:grpSpPr/>
       <p:sp>
         <p:nvSpPr>
-          <p:cNvPr id="2" name="Oval 1"/>
+          <p:cNvPr id="2" name="deckgen:decor"/>
           <p:cNvSpPr/>
           <p:nvPr/>
         </p:nvSpPr>
@@ -13794,7 +13794,7 @@
       </p:sp>
       <p:sp>
         <p:nvSpPr>
-          <p:cNvPr id="3" name="Oval 2"/>
+          <p:cNvPr id="3" name="deckgen:decor"/>
           <p:cNvSpPr/>
           <p:nvPr/>
         </p:nvSpPr>
@@ -13824,7 +13824,7 @@
       </p:sp>
       <p:sp>
         <p:nvSpPr>
-          <p:cNvPr id="4" name="Oval 3"/>
+          <p:cNvPr id="4" name="deckgen:decor"/>
           <p:cNvSpPr/>
           <p:nvPr/>
         </p:nvSpPr>

--- a/data-eng/decks/w3d4s1.pptx
+++ b/data-eng/decks/w3d4s1.pptx
@@ -6797,7 +6797,7 @@
                 <a:ea typeface="Pretendard"/>
                 <a:cs typeface="Pretendard"/>
               </a:rPr>
-              <a:t>MySQL 8.0 (2-2)</a:t>
+              <a:t>MySQL 9.7 (2-2)</a:t>
             </a:r>
           </a:p>
         </p:txBody>
